--- a/presentation/AgentPulse_Final_Review_v2.pptx
+++ b/presentation/AgentPulse_Final_Review_v2.pptx
@@ -15761,7 +15761,7 @@
                 <a:ea typeface="Calibri" pitchFamily="34" charset="-122"/>
                 <a:cs typeface="Calibri" pitchFamily="34" charset="-120"/>
               </a:rPr>
-              <a:t>Stage 1 - MiniLM-L6-v2 cosine gate, 27.8 ms. Fast-accepts the confident cases.</a:t>
+              <a:t>Stage 1 - MiniLM-L6-v2 cosine gate, 19.1 ms.</a:t>
             </a:r>
             <a:endParaRPr lang="en-US" sz="1150" dirty="0"/>
           </a:p>
@@ -15824,7 +15824,7 @@
                 <a:ea typeface="Calibri" pitchFamily="34" charset="-122"/>
                 <a:cs typeface="Calibri" pitchFamily="34" charset="-120"/>
               </a:rPr>
-              <a:t>End-to-end cascade: 215.9 ms mean per span.</a:t>
+              <a:t>End-to-end cascade: 151.19 ms mean per case (ablation, PyTorch path, 2026-09-18).</a:t>
             </a:r>
             <a:endParaRPr lang="en-US" sz="1150" dirty="0"/>
           </a:p>
@@ -15933,7 +15933,7 @@
                 <a:ea typeface="Calibri" pitchFamily="34" charset="-122"/>
                 <a:cs typeface="Calibri" pitchFamily="34" charset="-120"/>
               </a:rPr>
-              <a:t>Why a cascade and not NLI alone: the gate handles the common case at a seventh of the cost, and the ablation shows no F1 loss.</a:t>
+              <a:t>Why both models: the ablation shows MiniLM alone loses F1 (0.786 against 0.963), and adding it to DeBERTa costs about 19 ms per case and gains no F1.</a:t>
             </a:r>
             <a:endParaRPr lang="en-US" sz="1150" dirty="0"/>
           </a:p>

--- a/presentation/AgentPulse_Final_Review_v2.pptx
+++ b/presentation/AgentPulse_Final_Review_v2.pptx
@@ -253,7 +253,7 @@
             <c:bubble3D val="0"/>
             <c:spPr>
               <a:solidFill>
-                <a:srgbClr val="22D3EE"/>
+                <a:srgbClr val="FBBF24"/>
               </a:solidFill>
               <a:effectLst/>
             </c:spPr>
@@ -314,7 +314,7 @@
                   <c:v>0.619</c:v>
                 </c:pt>
                 <c:pt idx="6">
-                  <c:v>0.963</c:v>
+                  <c:v>0.897</c:v>
                 </c:pt>
               </c:numCache>
             </c:numRef>
@@ -1818,7 +1818,7 @@
           <a:p>
             <a:r>
               <a:rPr lang="en-US" dirty="0"/>
-              <a:t>Nine of the seventeen surveyed works are from 2023 onward, which meets the checklist requirement. The limitation column is what motivates the gap on the next slide: consistency metrics assume a single-document premise, judge-based methods pay per evaluation, drift methods are not tied to correctness, and MAST describes multi-agent failures without detecting them at runtime. Read every paper on this slide before the review - a panel that finds you cannot discuss a row you cited will discount the whole survey.</a:t>
+              <a:t>Say it plainly: this is a reading list. The seventeen works were verified to exist, and each row restates what the paper itself reports; none has been read in full yet. Nine of the seventeen are from 2023 onward. The limitation column is what motivates the gap on the next slide: consistency metrics assume a single-document premise, judge-based methods pay per evaluation, drift methods are not tied to correctness, and MAST describes multi-agent failures without detecting them at runtime. Read every paper on this slide before the review - a panel that finds you cannot discuss a row you cited will discount the whole survey.</a:t>
             </a:r>
             <a:endParaRPr lang="en-US" dirty="0"/>
           </a:p>
@@ -2258,7 +2258,7 @@
           <a:p>
             <a:r>
               <a:rPr lang="en-US" dirty="0"/>
-              <a:t>The panel will ask why four configurations report the same F1. The answer is the strongest methodological point in the deck: the test split could not exercise those components, and noticing that is what led to the external validation.</a:t>
+              <a:t>G was 0.963 in the result file, computed while DeBERTa's entailment and neutral outputs were swapped; on corrected labels at the weight it used (0.5) it is 0.897, because two supported answers the model calls neutral cross its 0.50 line. The panel will ask why four configurations report the same F1. The answer is the strongest methodological point in the deck: the test split could not exercise those components, and noticing that is what led to the external validation.</a:t>
             </a:r>
             <a:endParaRPr lang="en-US" dirty="0"/>
           </a:p>
@@ -4297,7 +4297,7 @@
                 <a:ea typeface="Calibri" pitchFamily="34" charset="-122"/>
                 <a:cs typeface="Calibri" pitchFamily="34" charset="-120"/>
               </a:rPr>
-              <a:t>No multi-seed repetition of the grounding benchmark. The 0.963 figure is a single run on a 30-case split, so it carries no variance estimate.</a:t>
+              <a:t>No multi-seed repetition of the grounding benchmark. The 0.963 figure is a single run on a 30-case split, 5 of whose cases copy dev cases.</a:t>
             </a:r>
             <a:endParaRPr lang="en-US" sz="1100" dirty="0"/>
           </a:p>
@@ -7551,7 +7551,7 @@
                 <a:ea typeface="Calibri" pitchFamily="34" charset="-122"/>
                 <a:cs typeface="Calibri" pitchFamily="34" charset="-120"/>
               </a:rPr>
-              <a:t>209 of 209 backend tests passing (pytest tests/ -q).</a:t>
+              <a:t>422 backend and 136 dashboard tests passing (25 Oct 2026).</a:t>
             </a:r>
             <a:endParaRPr lang="en-US" sz="1100" dirty="0"/>
           </a:p>
@@ -8031,7 +8031,7 @@
                 <a:ea typeface="Calibri" pitchFamily="34" charset="-122"/>
                 <a:cs typeface="Calibri" pitchFamily="34" charset="-120"/>
               </a:rPr>
-              <a:t>Literature survey</a:t>
+              <a:t>Literature</a:t>
             </a:r>
             <a:endParaRPr lang="en-US" sz="1150" dirty="0"/>
           </a:p>
@@ -8064,13 +8064,13 @@
             <a:r>
               <a:rPr lang="en-US" sz="1150" b="1" dirty="0">
                 <a:solidFill>
-                  <a:srgbClr val="15704F"/>
-                </a:solidFill>
-                <a:latin typeface="Calibri" pitchFamily="34" charset="0"/>
-                <a:ea typeface="Calibri" pitchFamily="34" charset="-122"/>
-                <a:cs typeface="Calibri" pitchFamily="34" charset="-120"/>
-              </a:rPr>
-              <a:t>17 works surveyed</a:t>
+                  <a:srgbClr val="9B6B00"/>
+                </a:solidFill>
+                <a:latin typeface="Calibri" pitchFamily="34" charset="0"/>
+                <a:ea typeface="Calibri" pitchFamily="34" charset="-122"/>
+                <a:cs typeface="Calibri" pitchFamily="34" charset="-120"/>
+              </a:rPr>
+              <a:t>Reading list, not read</a:t>
             </a:r>
             <a:endParaRPr lang="en-US" sz="1150" dirty="0"/>
           </a:p>
@@ -9466,7 +9466,7 @@
                 <a:ea typeface="Calibri" pitchFamily="34" charset="-122"/>
                 <a:cs typeface="Calibri" pitchFamily="34" charset="-120"/>
               </a:rPr>
-              <a:t>APPENDIX</a:t>
+              <a:t>APPENDIX - READING LIST, VERIFIED TO EXIST, NOT YET READ IN FULL</a:t>
             </a:r>
             <a:endParaRPr lang="en-US" sz="1050" dirty="0"/>
           </a:p>
@@ -11398,7 +11398,7 @@
                 <a:ea typeface="Calibri" pitchFamily="34" charset="-122"/>
                 <a:cs typeface="Calibri" pitchFamily="34" charset="-120"/>
               </a:rPr>
-              <a:t>LITERATURE SURVEY</a:t>
+              <a:t>LITERATURE - VERIFIED TO EXIST, NOT YET READ IN FULL</a:t>
             </a:r>
             <a:endParaRPr lang="en-US" sz="1050" dirty="0"/>
           </a:p>
@@ -11437,7 +11437,7 @@
                 <a:ea typeface="Cambria" pitchFamily="34" charset="-122"/>
                 <a:cs typeface="Cambria" pitchFamily="34" charset="-120"/>
               </a:rPr>
-              <a:t>Comparison of prior work</a:t>
+              <a:t>Reading list</a:t>
             </a:r>
             <a:endParaRPr lang="en-US" sz="3100" dirty="0"/>
           </a:p>
@@ -11505,7 +11505,7 @@
                 <a:ea typeface="Calibri" pitchFamily="34" charset="-122"/>
                 <a:cs typeface="Calibri" pitchFamily="34" charset="-120"/>
               </a:rPr>
-              <a:t>Lit. survey - comparison table</a:t>
+              <a:t>Reading list - not read in full</a:t>
             </a:r>
             <a:endParaRPr lang="en-US" sz="900" dirty="0"/>
           </a:p>
@@ -13764,7 +13764,7 @@
                 <a:ea typeface="Calibri" pitchFamily="34" charset="-122"/>
                 <a:cs typeface="Calibri" pitchFamily="34" charset="-120"/>
               </a:rPr>
-              <a:t>Ten of seventeen surveyed works shown; the full reference list is on the appendix slide. Read each one before defending this table - the panel may pick any row.</a:t>
+              <a:t>Reading list (verified to exist, not yet read in full): ten of seventeen works shown, each row restating what the paper reports. Full list on the appendix slide.</a:t>
             </a:r>
             <a:endParaRPr lang="en-US" sz="1100" dirty="0"/>
           </a:p>
@@ -14357,7 +14357,7 @@
                 <a:ea typeface="Calibri" pitchFamily="34" charset="-122"/>
                 <a:cs typeface="Calibri" pitchFamily="34" charset="-120"/>
               </a:rPr>
-              <a:t>Achieved - F1 0.963 on held-out v1.0_test</a:t>
+              <a:t>F1 0.963 on v1.0_test; 0.927-0.952 held out</a:t>
             </a:r>
             <a:endParaRPr lang="en-US" sz="1200" dirty="0"/>
           </a:p>
@@ -15761,7 +15761,7 @@
                 <a:ea typeface="Calibri" pitchFamily="34" charset="-122"/>
                 <a:cs typeface="Calibri" pitchFamily="34" charset="-120"/>
               </a:rPr>
-              <a:t>Stage 1 - MiniLM-L6-v2 cosine gate, 19.1 ms.</a:t>
+              <a:t>MiniLM-L6-v2 similarity, 19.1 ms, on every span (kept beside the score; not a gate).</a:t>
             </a:r>
             <a:endParaRPr lang="en-US" sz="1150" dirty="0"/>
           </a:p>
@@ -15782,7 +15782,7 @@
                 <a:ea typeface="Calibri" pitchFamily="34" charset="-122"/>
                 <a:cs typeface="Calibri" pitchFamily="34" charset="-120"/>
               </a:rPr>
-              <a:t>Stage 2 - DeBERTa-v3 cross-encoder NLI, run only when the gate is uncertain.</a:t>
+              <a:t>DeBERTa-v3 NLI on every span: risk = contradiction + 0.3 x neutral.</a:t>
             </a:r>
             <a:endParaRPr lang="en-US" sz="1150" dirty="0"/>
           </a:p>
@@ -18898,7 +18898,7 @@
                 <a:ea typeface="Calibri" pitchFamily="34" charset="-122"/>
                 <a:cs typeface="Calibri" pitchFamily="34" charset="-120"/>
               </a:rPr>
-              <a:t>Folding the drift score into a per-claim composite risk adds noise to a claim-level classification task - drift is a per-agent behavioural signal, not evidence about a single statement. The ablation shows the same effect independently: configuration F, NLI plus drift, drops to F1 0.619. Note also that this comparison is dated 18 August, nine days before the drift detector was rebuilt, so it measures the superseded signal. Re-running it is listed in future work.</a:t>
+              <a:t>Folding the drift score into a per-claim composite risk adds noise to a claim-level classification task - drift is a per-agent behavioural signal, not evidence about a single statement. The ablation shows the same effect independently: configuration F, NLI plus drift, drops to F1 0.619. Note also that this comparison is dated 18 August, before the drift detector was rebuilt and before the NLI label-order fix of October, so it measures superseded signals. It was not re-run.</a:t>
             </a:r>
             <a:endParaRPr lang="en-US" sz="1150" dirty="0"/>
           </a:p>
@@ -19201,7 +19201,7 @@
                 <a:ea typeface="Calibri" pitchFamily="34" charset="-122"/>
                 <a:cs typeface="Calibri" pitchFamily="34" charset="-120"/>
               </a:rPr>
-              <a:t>The cascade (C) matches NLI alone (B) at 0.963 while handling the common case at a fraction of the cost. That is the justification for the gate.</a:t>
+              <a:t>The cascade (C) matches NLI alone (B) at 0.963; MiniLM adds about 19 ms and no F1.</a:t>
             </a:r>
             <a:endParaRPr lang="en-US" sz="1100" dirty="0"/>
           </a:p>
@@ -19243,7 +19243,7 @@
                 <a:ea typeface="Calibri" pitchFamily="34" charset="-122"/>
                 <a:cs typeface="Calibri" pitchFamily="34" charset="-120"/>
               </a:rPr>
-              <a:t>Drift (F) actively harms classification, 0.619.</a:t>
+              <a:t>Drift (F) harms classification, 0.619. Full pipeline (G) 0.897 on corrected labels at the old 0.5 weight; not re-run at 0.3.</a:t>
             </a:r>
             <a:endParaRPr lang="en-US" sz="1100" dirty="0"/>
           </a:p>
@@ -19578,7 +19578,7 @@
         <p:spPr>
           <a:xfrm>
             <a:off x="960120" y="2542032"/>
-            <a:ext cx="2743200" cy="274320"/>
+            <a:ext cx="3657600" cy="274320"/>
           </a:xfrm>
           <a:prstGeom prst="rect">
             <a:avLst/>
@@ -19602,7 +19602,7 @@
                 <a:ea typeface="Calibri" pitchFamily="34" charset="-122"/>
                 <a:cs typeface="Calibri" pitchFamily="34" charset="-120"/>
               </a:rPr>
-              <a:t>F1 on held-out v1.0_test</a:t>
+              <a:t>F1 on v1.0_test, shipped score</a:t>
             </a:r>
             <a:endParaRPr lang="en-US" sz="1150" dirty="0"/>
           </a:p>
@@ -19641,7 +19641,7 @@
                 <a:ea typeface="Calibri" pitchFamily="34" charset="-122"/>
                 <a:cs typeface="Calibri" pitchFamily="34" charset="-120"/>
               </a:rPr>
-              <a:t>Precision 0.929, recall 1.000, FPR 0.059. Thresholds were selected on the dev split and applied unchanged.</a:t>
+              <a:t>P 0.929, R 1.000, FPR 0.059 at both cut-offs. 5 of 30 test cases copy dev; on 47 held-out cases F1 0.927-0.952.</a:t>
             </a:r>
             <a:endParaRPr lang="en-US" sz="1150" dirty="0"/>
           </a:p>
